--- a/Prezentace/2. ročník/PGM_06_vicerozmerne_pole_slovniky.pptx
+++ b/Prezentace/2. ročník/PGM_06_vicerozmerne_pole_slovniky.pptx
@@ -1211,7 +1211,7 @@
             <a:pPr rtl="0"/>
             <a:fld id="{927DCA4C-7825-44A0-B31A-4BAD6120D580}" type="datetime1">
               <a:rPr lang="cs-CZ" smtClean="0"/>
-              <a:t>30.11.2025</a:t>
+              <a:t>01.12.2025</a:t>
             </a:fld>
             <a:endParaRPr lang="en-US" dirty="0"/>
           </a:p>
@@ -1381,7 +1381,7 @@
             <a:pPr rtl="0"/>
             <a:fld id="{51CCFE8D-08E6-40AC-BF4B-494C67BC535C}" type="datetime1">
               <a:rPr lang="cs-CZ" smtClean="0"/>
-              <a:t>30.11.2025</a:t>
+              <a:t>01.12.2025</a:t>
             </a:fld>
             <a:endParaRPr lang="en-US"/>
           </a:p>
@@ -1902,7 +1902,7 @@
             <a:pPr rtl="0"/>
             <a:fld id="{A8EC4697-A511-4167-98D5-E240268A2670}" type="datetime1">
               <a:rPr lang="cs-CZ" smtClean="0"/>
-              <a:t>30.11.2025</a:t>
+              <a:t>01.12.2025</a:t>
             </a:fld>
             <a:endParaRPr lang="en-US" dirty="0"/>
           </a:p>
@@ -2109,7 +2109,7 @@
             <a:pPr rtl="0"/>
             <a:fld id="{75C2422F-D08F-49D0-98CD-DC7D2F2607DE}" type="datetime1">
               <a:rPr lang="cs-CZ" smtClean="0"/>
-              <a:t>30.11.2025</a:t>
+              <a:t>01.12.2025</a:t>
             </a:fld>
             <a:endParaRPr lang="en-US" dirty="0"/>
           </a:p>
@@ -2475,7 +2475,7 @@
             <a:pPr rtl="0"/>
             <a:fld id="{9472C44F-B7A3-4350-988C-CFC166A0AA82}" type="datetime1">
               <a:rPr lang="cs-CZ" smtClean="0"/>
-              <a:t>30.11.2025</a:t>
+              <a:t>01.12.2025</a:t>
             </a:fld>
             <a:endParaRPr lang="en-US" dirty="0"/>
           </a:p>
@@ -2677,7 +2677,7 @@
             <a:pPr rtl="0"/>
             <a:fld id="{9E25B38F-3440-48E9-8BA6-B9B0E297B628}" type="datetime1">
               <a:rPr lang="cs-CZ" smtClean="0"/>
-              <a:t>30.11.2025</a:t>
+              <a:t>01.12.2025</a:t>
             </a:fld>
             <a:endParaRPr lang="en-US" dirty="0"/>
           </a:p>
@@ -2993,7 +2993,7 @@
             <a:pPr rtl="0"/>
             <a:fld id="{BACB43DD-355E-4ACB-AF6B-F0A0D93B1FF7}" type="datetime1">
               <a:rPr lang="cs-CZ" smtClean="0"/>
-              <a:t>30.11.2025</a:t>
+              <a:t>01.12.2025</a:t>
             </a:fld>
             <a:endParaRPr lang="en-US" dirty="0"/>
           </a:p>
@@ -3250,7 +3250,7 @@
             <a:pPr rtl="0"/>
             <a:fld id="{ED0DC0DA-1C84-4CFB-A589-758D033EC754}" type="datetime1">
               <a:rPr lang="cs-CZ" smtClean="0"/>
-              <a:t>30.11.2025</a:t>
+              <a:t>01.12.2025</a:t>
             </a:fld>
             <a:endParaRPr lang="en-US" dirty="0"/>
           </a:p>
@@ -3676,7 +3676,7 @@
             <a:pPr rtl="0"/>
             <a:fld id="{4E68CB40-5E53-430A-BC80-66A7330A3E11}" type="datetime1">
               <a:rPr lang="cs-CZ" smtClean="0"/>
-              <a:t>30.11.2025</a:t>
+              <a:t>01.12.2025</a:t>
             </a:fld>
             <a:endParaRPr lang="en-US" dirty="0"/>
           </a:p>
@@ -3803,7 +3803,7 @@
             <a:pPr rtl="0"/>
             <a:fld id="{AD030092-A1C2-46B4-B050-3676FFA9CD44}" type="datetime1">
               <a:rPr lang="cs-CZ" smtClean="0"/>
-              <a:t>30.11.2025</a:t>
+              <a:t>01.12.2025</a:t>
             </a:fld>
             <a:endParaRPr lang="en-US" dirty="0"/>
           </a:p>
@@ -3901,7 +3901,7 @@
             <a:pPr rtl="0"/>
             <a:fld id="{FECD7C02-7CC9-44AF-9768-6A6F42347937}" type="datetime1">
               <a:rPr lang="cs-CZ" smtClean="0"/>
-              <a:t>30.11.2025</a:t>
+              <a:t>01.12.2025</a:t>
             </a:fld>
             <a:endParaRPr lang="en-US" dirty="0"/>
           </a:p>
@@ -4282,7 +4282,7 @@
             <a:pPr rtl="0"/>
             <a:fld id="{4E756D9B-B1BA-4BAF-99A5-DC08EF34F207}" type="datetime1">
               <a:rPr lang="cs-CZ" smtClean="0"/>
-              <a:t>30.11.2025</a:t>
+              <a:t>01.12.2025</a:t>
             </a:fld>
             <a:endParaRPr lang="en-US" dirty="0"/>
           </a:p>
@@ -4580,7 +4580,7 @@
             <a:pPr rtl="0"/>
             <a:fld id="{48E295CD-EF07-4568-A35E-D8DFD54CCEB6}" type="datetime1">
               <a:rPr lang="cs-CZ" smtClean="0"/>
-              <a:t>30.11.2025</a:t>
+              <a:t>01.12.2025</a:t>
             </a:fld>
             <a:endParaRPr lang="en-US" dirty="0"/>
           </a:p>
@@ -4798,7 +4798,7 @@
             <a:pPr rtl="0"/>
             <a:fld id="{1900C9E6-3834-4C30-AC74-37ACA7F99694}" type="datetime1">
               <a:rPr lang="cs-CZ" smtClean="0"/>
-              <a:t>30.11.2025</a:t>
+              <a:t>01.12.2025</a:t>
             </a:fld>
             <a:endParaRPr lang="en-US" dirty="0"/>
           </a:p>
@@ -5907,17 +5907,8 @@
             <a:pPr marL="228600" indent="-228600"/>
             <a:r>
               <a:rPr lang="cs-CZ" sz="2000" dirty="0"/>
-              <a:t>Statická </a:t>
-            </a:r>
-            <a:r>
-              <a:rPr lang="cs-CZ" sz="2000" dirty="0" err="1"/>
-              <a:t>homogení</a:t>
-            </a:r>
-            <a:r>
-              <a:rPr lang="cs-CZ" sz="2000" dirty="0"/>
-              <a:t> datová struktura umožňující ukládat více prvků</a:t>
-            </a:r>
-            <a:endParaRPr lang="cs-CZ" sz="2000"/>
+              <a:t>Statická homogenní datová struktura umožňující ukládat více prvků</a:t>
+            </a:r>
           </a:p>
           <a:p>
             <a:pPr marL="228600" indent="-228600"/>
@@ -6011,7 +6002,7 @@
                   <a:spcPts val="600"/>
                 </a:spcAft>
               </a:pPr>
-              <a:t>30.11.2025</a:t>
+              <a:t>01.12.2025</a:t>
             </a:fld>
             <a:endParaRPr lang="en-US"/>
           </a:p>
@@ -6176,7 +6167,7 @@
             <a:pPr rtl="0"/>
             <a:fld id="{9E25B38F-3440-48E9-8BA6-B9B0E297B628}" type="datetime1">
               <a:rPr lang="cs-CZ" smtClean="0"/>
-              <a:t>30.11.2025</a:t>
+              <a:t>01.12.2025</a:t>
             </a:fld>
             <a:endParaRPr lang="en-US" dirty="0"/>
           </a:p>
@@ -6368,7 +6359,7 @@
                   <a:spcPts val="600"/>
                 </a:spcAft>
               </a:pPr>
-              <a:t>30.11.2025</a:t>
+              <a:t>01.12.2025</a:t>
             </a:fld>
             <a:endParaRPr lang="en-US"/>
           </a:p>
@@ -6496,12 +6487,8 @@
           <a:p>
             <a:pPr marL="305435" indent="-305435"/>
             <a:r>
-              <a:rPr lang="cs-CZ" sz="2000" dirty="0" err="1"/>
-              <a:t>Náchýlnější</a:t>
-            </a:r>
-            <a:r>
               <a:rPr lang="cs-CZ" sz="2000" dirty="0"/>
-              <a:t> na výjimky při přístupu na prvek</a:t>
+              <a:t>Náchylnější na výjimky při přístupu na prvek</a:t>
             </a:r>
           </a:p>
         </p:txBody>
@@ -6577,7 +6564,7 @@
                   <a:spcPts val="600"/>
                 </a:spcAft>
               </a:pPr>
-              <a:t>30.11.2025</a:t>
+              <a:t>01.12.2025</a:t>
             </a:fld>
             <a:endParaRPr lang="en-US"/>
           </a:p>
@@ -6747,7 +6734,7 @@
                   <a:spcPts val="600"/>
                 </a:spcAft>
               </a:pPr>
-              <a:t>30.11.2025</a:t>
+              <a:t>01.12.2025</a:t>
             </a:fld>
             <a:endParaRPr lang="en-US"/>
           </a:p>
@@ -6891,13 +6878,8 @@
             <a:pPr marL="305435" indent="-305435"/>
             <a:r>
               <a:rPr lang="cs-CZ" sz="2000" dirty="0"/>
-              <a:t>Rychlé vyhledávání díky </a:t>
-            </a:r>
-            <a:r>
-              <a:rPr lang="cs-CZ" sz="2000" err="1"/>
-              <a:t>hashování</a:t>
-            </a:r>
-            <a:endParaRPr lang="cs-CZ" sz="2000"/>
+              <a:t>Rychlé vyhledávání díky hashovaní</a:t>
+            </a:r>
           </a:p>
           <a:p>
             <a:pPr marL="305435" indent="-305435"/>
@@ -6933,7 +6915,7 @@
               <a:t>Zjištění existence klíče </a:t>
             </a:r>
             <a:r>
-              <a:rPr lang="cs-CZ" sz="2000" i="1" err="1"/>
+              <a:rPr lang="cs-CZ" sz="2000" i="1" dirty="0" err="1"/>
               <a:t>ContainsKey</a:t>
             </a:r>
             <a:r>
@@ -6987,7 +6969,7 @@
                   <a:spcPts val="600"/>
                 </a:spcAft>
               </a:pPr>
-              <a:t>30.11.2025</a:t>
+              <a:t>01.12.2025</a:t>
             </a:fld>
             <a:endParaRPr lang="en-US"/>
           </a:p>
@@ -7828,15 +7810,6 @@
 </file>
 
 <file path=customXml/item1.xml><?xml version="1.0" encoding="utf-8"?>
-<?mso-contentType ?>
-<FormTemplates xmlns="http://schemas.microsoft.com/sharepoint/v3/contenttype/forms">
-  <Display>DocumentLibraryForm</Display>
-  <Edit>DocumentLibraryForm</Edit>
-  <New>DocumentLibraryForm</New>
-</FormTemplates>
-</file>
-
-<file path=customXml/item2.xml><?xml version="1.0" encoding="utf-8"?>
 <ct:contentTypeSchema xmlns:ct="http://schemas.microsoft.com/office/2006/metadata/contentType" xmlns:ma="http://schemas.microsoft.com/office/2006/metadata/properties/metaAttributes" ct:_="" ma:_="" ma:contentTypeName="Dokument" ma:contentTypeID="0x010100835861FD81B3EE45AAC4C81C5640ECE7" ma:contentTypeVersion="4" ma:contentTypeDescription="Vytvoří nový dokument" ma:contentTypeScope="" ma:versionID="21fa4c386deca7c7aab8d7d13eb8f814">
   <xsd:schema xmlns:xsd="http://www.w3.org/2001/XMLSchema" xmlns:xs="http://www.w3.org/2001/XMLSchema" xmlns:p="http://schemas.microsoft.com/office/2006/metadata/properties" xmlns:ns2="c8cc7701-65b3-4efe-89ae-c871b5b7820b" targetNamespace="http://schemas.microsoft.com/office/2006/metadata/properties" ma:root="true" ma:fieldsID="409195400939cd53ac6c0f0275b4eac9" ns2:_="">
     <xsd:import namespace="c8cc7701-65b3-4efe-89ae-c871b5b7820b"/>
@@ -7980,6 +7953,15 @@
 </ct:contentTypeSchema>
 </file>
 
+<file path=customXml/item2.xml><?xml version="1.0" encoding="utf-8"?>
+<?mso-contentType ?>
+<FormTemplates xmlns="http://schemas.microsoft.com/sharepoint/v3/contenttype/forms">
+  <Display>DocumentLibraryForm</Display>
+  <Edit>DocumentLibraryForm</Edit>
+  <New>DocumentLibraryForm</New>
+</FormTemplates>
+</file>
+
 <file path=customXml/item3.xml><?xml version="1.0" encoding="utf-8"?>
 <p:properties xmlns:p="http://schemas.microsoft.com/office/2006/metadata/properties" xmlns:xsi="http://www.w3.org/2001/XMLSchema-instance" xmlns:pc="http://schemas.microsoft.com/office/infopath/2007/PartnerControls">
   <documentManagement/>
@@ -7987,14 +7969,6 @@
 </file>
 
 <file path=customXml/itemProps1.xml><?xml version="1.0" encoding="utf-8"?>
-<ds:datastoreItem xmlns:ds="http://schemas.openxmlformats.org/officeDocument/2006/customXml" ds:itemID="{5E49B5DC-8932-455E-8A8D-F16FDACEC9B1}">
-  <ds:schemaRefs>
-    <ds:schemaRef ds:uri="http://schemas.microsoft.com/sharepoint/v3/contenttype/forms"/>
-  </ds:schemaRefs>
-</ds:datastoreItem>
-</file>
-
-<file path=customXml/itemProps2.xml><?xml version="1.0" encoding="utf-8"?>
 <ds:datastoreItem xmlns:ds="http://schemas.openxmlformats.org/officeDocument/2006/customXml" ds:itemID="{5ADA65AE-BB47-4353-9756-CEC17E071E47}">
   <ds:schemaRefs>
     <ds:schemaRef ds:uri="http://schemas.microsoft.com/office/2006/metadata/contentType"/>
@@ -8012,6 +7986,14 @@
 </ds:datastoreItem>
 </file>
 
+<file path=customXml/itemProps2.xml><?xml version="1.0" encoding="utf-8"?>
+<ds:datastoreItem xmlns:ds="http://schemas.openxmlformats.org/officeDocument/2006/customXml" ds:itemID="{5E49B5DC-8932-455E-8A8D-F16FDACEC9B1}">
+  <ds:schemaRefs>
+    <ds:schemaRef ds:uri="http://schemas.microsoft.com/sharepoint/v3/contenttype/forms"/>
+  </ds:schemaRefs>
+</ds:datastoreItem>
+</file>
+
 <file path=customXml/itemProps3.xml><?xml version="1.0" encoding="utf-8"?>
 <ds:datastoreItem xmlns:ds="http://schemas.openxmlformats.org/officeDocument/2006/customXml" ds:itemID="{DF3CDFA7-8B23-4853-8EB8-EE6E351B90A2}">
   <ds:schemaRefs>
